--- a/presentation/Voyage_Analytics_MLOps_Srushti_Suthar.pptx
+++ b/presentation/Voyage_Analytics_MLOps_Srushti_Suthar.pptx
@@ -1,11 +1,11 @@
 
 <file path=ppt/presentation.xml><?xml version="1.0" encoding="utf-8"?>
-<p:presentation xmlns:a="http://schemas.openxmlformats.org/drawingml/2006/main" xmlns:r="http://schemas.openxmlformats.org/officeDocument/2006/relationships" xmlns:p="http://schemas.openxmlformats.org/presentationml/2006/main" saveSubsetFonts="1">
+<p:presentation xmlns:a="http://schemas.openxmlformats.org/drawingml/2006/main" xmlns:r="http://schemas.openxmlformats.org/officeDocument/2006/relationships" xmlns:p="http://schemas.openxmlformats.org/presentationml/2006/main" showSpecialPlsOnTitleSld="0" saveSubsetFonts="1">
   <p:sldMasterIdLst>
     <p:sldMasterId id="2147483660" r:id="rId1"/>
   </p:sldMasterIdLst>
   <p:notesMasterIdLst>
-    <p:notesMasterId r:id="rId12"/>
+    <p:notesMasterId r:id="rId16"/>
   </p:notesMasterIdLst>
   <p:sldIdLst>
     <p:sldId id="256" r:id="rId2"/>
@@ -18,6 +18,10 @@
     <p:sldId id="260" r:id="rId9"/>
     <p:sldId id="265" r:id="rId10"/>
     <p:sldId id="264" r:id="rId11"/>
+    <p:sldId id="267" r:id="rId12"/>
+    <p:sldId id="266" r:id="rId13"/>
+    <p:sldId id="269" r:id="rId14"/>
+    <p:sldId id="268" r:id="rId15"/>
   </p:sldIdLst>
   <p:sldSz cx="12192000" cy="6858000"/>
   <p:notesSz cx="6858000" cy="9144000"/>
@@ -9260,7 +9264,7 @@
           <a:bodyPr/>
           <a:lstStyle/>
           <a:p>
-            <a:fld id="{CF115A49-3DB4-434A-B982-D67B612E5D47}" type="datetimeFigureOut">
+            <a:fld id="{9EB69F89-A5C9-447F-BB3B-ED05549B4925}" type="datetime1">
               <a:rPr lang="en-US" smtClean="0"/>
               <a:t>1/21/2026</a:t>
             </a:fld>
@@ -9554,7 +9558,7 @@
           <a:bodyPr/>
           <a:lstStyle/>
           <a:p>
-            <a:fld id="{CF115A49-3DB4-434A-B982-D67B612E5D47}" type="datetimeFigureOut">
+            <a:fld id="{65833B5B-7631-4C76-B46E-82AD0CF3C525}" type="datetime1">
               <a:rPr lang="en-US" smtClean="0"/>
               <a:t>1/21/2026</a:t>
             </a:fld>
@@ -9728,7 +9732,7 @@
           <a:bodyPr/>
           <a:lstStyle/>
           <a:p>
-            <a:fld id="{CF115A49-3DB4-434A-B982-D67B612E5D47}" type="datetimeFigureOut">
+            <a:fld id="{4B5FB175-B636-4A64-B02F-730E6FEF9BD6}" type="datetime1">
               <a:rPr lang="en-US" smtClean="0"/>
               <a:t>1/21/2026</a:t>
             </a:fld>
@@ -9965,7 +9969,7 @@
           <a:bodyPr/>
           <a:lstStyle/>
           <a:p>
-            <a:fld id="{CF115A49-3DB4-434A-B982-D67B612E5D47}" type="datetimeFigureOut">
+            <a:fld id="{E152E3F1-3F48-4BAA-A814-38F3AE278AD9}" type="datetime1">
               <a:rPr lang="en-US" smtClean="0"/>
               <a:t>1/21/2026</a:t>
             </a:fld>
@@ -10344,7 +10348,7 @@
           <a:bodyPr/>
           <a:lstStyle/>
           <a:p>
-            <a:fld id="{CF115A49-3DB4-434A-B982-D67B612E5D47}" type="datetimeFigureOut">
+            <a:fld id="{56637CE0-98BE-4103-BBD8-D779D7312DE2}" type="datetime1">
               <a:rPr lang="en-US" smtClean="0"/>
               <a:t>1/21/2026</a:t>
             </a:fld>
@@ -10462,7 +10466,7 @@
           <a:bodyPr/>
           <a:lstStyle/>
           <a:p>
-            <a:fld id="{CF115A49-3DB4-434A-B982-D67B612E5D47}" type="datetimeFigureOut">
+            <a:fld id="{DB3BF539-967A-4713-ADAD-D9DFB1263C9A}" type="datetime1">
               <a:rPr lang="en-US" smtClean="0"/>
               <a:t>1/21/2026</a:t>
             </a:fld>
@@ -10645,7 +10649,7 @@
           <a:bodyPr/>
           <a:lstStyle/>
           <a:p>
-            <a:fld id="{CF115A49-3DB4-434A-B982-D67B612E5D47}" type="datetimeFigureOut">
+            <a:fld id="{5D4F1E64-B5DC-4EA9-9620-E883EEB24B5C}" type="datetime1">
               <a:rPr lang="en-US" smtClean="0"/>
               <a:t>1/21/2026</a:t>
             </a:fld>
@@ -11011,7 +11015,7 @@
             </a:lvl1pPr>
           </a:lstStyle>
           <a:p>
-            <a:fld id="{CF115A49-3DB4-434A-B982-D67B612E5D47}" type="datetimeFigureOut">
+            <a:fld id="{9A0DED7A-CA28-44C2-B00C-BD05417B2F87}" type="datetime1">
               <a:rPr lang="en-US" smtClean="0"/>
               <a:t>1/21/2026</a:t>
             </a:fld>
@@ -11401,7 +11405,7 @@
           <a:bodyPr/>
           <a:lstStyle/>
           <a:p>
-            <a:fld id="{CF115A49-3DB4-434A-B982-D67B612E5D47}" type="datetimeFigureOut">
+            <a:fld id="{07EEAE5F-59C3-495B-BBAF-F07F11A02912}" type="datetime1">
               <a:rPr lang="en-US" smtClean="0"/>
               <a:t>1/21/2026</a:t>
             </a:fld>
@@ -11571,7 +11575,7 @@
           <a:bodyPr/>
           <a:lstStyle/>
           <a:p>
-            <a:fld id="{CF115A49-3DB4-434A-B982-D67B612E5D47}" type="datetimeFigureOut">
+            <a:fld id="{BE0DA698-87C7-4FE8-8959-F554A5ACC005}" type="datetime1">
               <a:rPr lang="en-US" smtClean="0"/>
               <a:t>1/21/2026</a:t>
             </a:fld>
@@ -11870,7 +11874,7 @@
             </a:lvl1pPr>
           </a:lstStyle>
           <a:p>
-            <a:fld id="{CF115A49-3DB4-434A-B982-D67B612E5D47}" type="datetimeFigureOut">
+            <a:fld id="{F743DAF1-7026-492D-AB20-E7195EE97F51}" type="datetime1">
               <a:rPr lang="en-US" smtClean="0"/>
               <a:t>1/21/2026</a:t>
             </a:fld>
@@ -12010,6 +12014,7 @@
     <p:sldLayoutId id="2147483670" r:id="rId9"/>
     <p:sldLayoutId id="2147483671" r:id="rId10"/>
   </p:sldLayoutIdLst>
+  <p:hf hdr="0" ftr="0" dt="0"/>
   <p:txStyles>
     <p:titleStyle>
       <a:lvl1pPr algn="l" defTabSz="914400" rtl="0" eaLnBrk="1" latinLnBrk="0" hangingPunct="1">
@@ -12543,8 +12548,8 @@
         </p:nvSpPr>
         <p:spPr>
           <a:xfrm>
-            <a:off x="4260916" y="4678968"/>
-            <a:ext cx="3261674" cy="923330"/>
+            <a:off x="4106943" y="4678968"/>
+            <a:ext cx="3978111" cy="923330"/>
           </a:xfrm>
           <a:prstGeom prst="rect">
             <a:avLst/>
@@ -12567,19 +12572,40 @@
             <a:pPr algn="ctr"/>
             <a:r>
               <a:rPr lang="en-US" dirty="0"/>
-              <a:t>15</a:t>
-            </a:r>
-            <a:r>
-              <a:rPr lang="en-US" baseline="30000" dirty="0"/>
-              <a:t>th</a:t>
-            </a:r>
-            <a:r>
-              <a:rPr lang="en-US" dirty="0"/>
-              <a:t> July 2025 batch</a:t>
+              <a:t>15/07/25 – 15/01/26</a:t>
             </a:r>
           </a:p>
           <a:p>
             <a:endParaRPr lang="en-US" dirty="0"/>
+          </a:p>
+        </p:txBody>
+      </p:sp>
+      <p:sp>
+        <p:nvSpPr>
+          <p:cNvPr id="5" name="Slide Number Placeholder 4">
+            <a:extLst>
+              <a:ext uri="{FF2B5EF4-FFF2-40B4-BE49-F238E27FC236}">
+                <a16:creationId xmlns:a16="http://schemas.microsoft.com/office/drawing/2014/main" id="{776CE300-1071-12EC-9EF5-43F798014A28}"/>
+              </a:ext>
+            </a:extLst>
+          </p:cNvPr>
+          <p:cNvSpPr>
+            <a:spLocks noGrp="1"/>
+          </p:cNvSpPr>
+          <p:nvPr>
+            <p:ph type="sldNum" sz="quarter" idx="12"/>
+          </p:nvPr>
+        </p:nvSpPr>
+        <p:spPr/>
+        <p:txBody>
+          <a:bodyPr/>
+          <a:lstStyle/>
+          <a:p>
+            <a:fld id="{FB36CCB4-83A5-44F7-9530-B4433D444995}" type="slidenum">
+              <a:rPr lang="en-US" smtClean="0"/>
+              <a:t>1</a:t>
+            </a:fld>
+            <a:endParaRPr lang="en-US"/>
           </a:p>
         </p:txBody>
       </p:sp>
@@ -12631,8 +12657,8 @@
         </p:nvSpPr>
         <p:spPr>
           <a:xfrm>
-            <a:off x="1039368" y="5746128"/>
-            <a:ext cx="10113264" cy="822960"/>
+            <a:off x="1039353" y="6312641"/>
+            <a:ext cx="10113264" cy="583067"/>
           </a:xfrm>
         </p:spPr>
         <p:txBody>
@@ -12642,11 +12668,11 @@
             <a:pPr algn="ctr"/>
             <a:r>
               <a:rPr lang="en-US" dirty="0" err="1"/>
-              <a:t>Streamlit</a:t>
+              <a:t>MLFlow</a:t>
             </a:r>
             <a:r>
               <a:rPr lang="en-US" dirty="0"/>
-              <a:t> Web Application</a:t>
+              <a:t> UI – Models registered</a:t>
             </a:r>
           </a:p>
         </p:txBody>
@@ -12669,10 +12695,766 @@
         </p:nvSpPr>
         <p:spPr/>
       </p:sp>
+      <p:pic>
+        <p:nvPicPr>
+          <p:cNvPr id="7" name="Picture 6">
+            <a:extLst>
+              <a:ext uri="{FF2B5EF4-FFF2-40B4-BE49-F238E27FC236}">
+                <a16:creationId xmlns:a16="http://schemas.microsoft.com/office/drawing/2014/main" id="{42261267-BD3E-6987-1D38-A2038182D881}"/>
+              </a:ext>
+            </a:extLst>
+          </p:cNvPr>
+          <p:cNvPicPr>
+            <a:picLocks noChangeAspect="1"/>
+          </p:cNvPicPr>
+          <p:nvPr/>
+        </p:nvPicPr>
+        <p:blipFill>
+          <a:blip r:embed="rId2"/>
+          <a:stretch>
+            <a:fillRect/>
+          </a:stretch>
+        </p:blipFill>
+        <p:spPr>
+          <a:xfrm>
+            <a:off x="-15" y="0"/>
+            <a:ext cx="12192000" cy="6454962"/>
+          </a:xfrm>
+          <a:prstGeom prst="rect">
+            <a:avLst/>
+          </a:prstGeom>
+        </p:spPr>
+      </p:pic>
+      <p:sp>
+        <p:nvSpPr>
+          <p:cNvPr id="8" name="Slide Number Placeholder 7">
+            <a:extLst>
+              <a:ext uri="{FF2B5EF4-FFF2-40B4-BE49-F238E27FC236}">
+                <a16:creationId xmlns:a16="http://schemas.microsoft.com/office/drawing/2014/main" id="{079E5A04-DE83-94BF-98B7-3FEE5E0C5379}"/>
+              </a:ext>
+            </a:extLst>
+          </p:cNvPr>
+          <p:cNvSpPr>
+            <a:spLocks noGrp="1"/>
+          </p:cNvSpPr>
+          <p:nvPr>
+            <p:ph type="sldNum" sz="quarter" idx="12"/>
+          </p:nvPr>
+        </p:nvSpPr>
+        <p:spPr/>
+        <p:txBody>
+          <a:bodyPr/>
+          <a:lstStyle/>
+          <a:p>
+            <a:fld id="{FB36CCB4-83A5-44F7-9530-B4433D444995}" type="slidenum">
+              <a:rPr lang="en-US" smtClean="0"/>
+              <a:t>10</a:t>
+            </a:fld>
+            <a:endParaRPr lang="en-US"/>
+          </a:p>
+        </p:txBody>
+      </p:sp>
     </p:spTree>
     <p:extLst>
       <p:ext uri="{BB962C8B-B14F-4D97-AF65-F5344CB8AC3E}">
         <p14:creationId xmlns:p14="http://schemas.microsoft.com/office/powerpoint/2010/main" val="919673615"/>
+      </p:ext>
+    </p:extLst>
+  </p:cSld>
+  <p:clrMapOvr>
+    <a:masterClrMapping/>
+  </p:clrMapOvr>
+</p:sld>
+</file>
+
+<file path=ppt/slides/slide11.xml><?xml version="1.0" encoding="utf-8"?>
+<p:sld xmlns:a="http://schemas.openxmlformats.org/drawingml/2006/main" xmlns:r="http://schemas.openxmlformats.org/officeDocument/2006/relationships" xmlns:p="http://schemas.openxmlformats.org/presentationml/2006/main">
+  <p:cSld>
+    <p:spTree>
+      <p:nvGrpSpPr>
+        <p:cNvPr id="1" name="">
+          <a:extLst>
+            <a:ext uri="{FF2B5EF4-FFF2-40B4-BE49-F238E27FC236}">
+              <a16:creationId xmlns:a16="http://schemas.microsoft.com/office/drawing/2014/main" id="{610CD028-278B-6E76-2E1B-1E2B7931A1A9}"/>
+            </a:ext>
+          </a:extLst>
+        </p:cNvPr>
+        <p:cNvGrpSpPr/>
+        <p:nvPr/>
+      </p:nvGrpSpPr>
+      <p:grpSpPr>
+        <a:xfrm>
+          <a:off x="0" y="0"/>
+          <a:ext cx="0" cy="0"/>
+          <a:chOff x="0" y="0"/>
+          <a:chExt cx="0" cy="0"/>
+        </a:xfrm>
+      </p:grpSpPr>
+      <p:sp>
+        <p:nvSpPr>
+          <p:cNvPr id="2" name="Title 1">
+            <a:extLst>
+              <a:ext uri="{FF2B5EF4-FFF2-40B4-BE49-F238E27FC236}">
+                <a16:creationId xmlns:a16="http://schemas.microsoft.com/office/drawing/2014/main" id="{75E3D260-00F6-9C42-ADC2-ACC68C1FFC17}"/>
+              </a:ext>
+            </a:extLst>
+          </p:cNvPr>
+          <p:cNvSpPr>
+            <a:spLocks noGrp="1"/>
+          </p:cNvSpPr>
+          <p:nvPr>
+            <p:ph type="title"/>
+          </p:nvPr>
+        </p:nvSpPr>
+        <p:spPr>
+          <a:xfrm>
+            <a:off x="1039368" y="5825765"/>
+            <a:ext cx="10113264" cy="583067"/>
+          </a:xfrm>
+        </p:spPr>
+        <p:txBody>
+          <a:bodyPr/>
+          <a:lstStyle/>
+          <a:p>
+            <a:pPr algn="ctr"/>
+            <a:r>
+              <a:rPr lang="en-US" dirty="0"/>
+              <a:t>Flask API Health check</a:t>
+            </a:r>
+          </a:p>
+        </p:txBody>
+      </p:sp>
+      <p:sp>
+        <p:nvSpPr>
+          <p:cNvPr id="3" name="Picture Placeholder 2">
+            <a:extLst>
+              <a:ext uri="{FF2B5EF4-FFF2-40B4-BE49-F238E27FC236}">
+                <a16:creationId xmlns:a16="http://schemas.microsoft.com/office/drawing/2014/main" id="{727FEB9B-3C17-128B-712C-100234DD3EAE}"/>
+              </a:ext>
+            </a:extLst>
+          </p:cNvPr>
+          <p:cNvSpPr>
+            <a:spLocks noGrp="1"/>
+          </p:cNvSpPr>
+          <p:nvPr>
+            <p:ph type="pic" idx="1"/>
+          </p:nvPr>
+        </p:nvSpPr>
+        <p:spPr/>
+      </p:sp>
+      <p:pic>
+        <p:nvPicPr>
+          <p:cNvPr id="5" name="Picture 4">
+            <a:extLst>
+              <a:ext uri="{FF2B5EF4-FFF2-40B4-BE49-F238E27FC236}">
+                <a16:creationId xmlns:a16="http://schemas.microsoft.com/office/drawing/2014/main" id="{0F60E08F-C33B-BBA3-ED6E-9DFC06C21B89}"/>
+              </a:ext>
+            </a:extLst>
+          </p:cNvPr>
+          <p:cNvPicPr>
+            <a:picLocks noChangeAspect="1"/>
+          </p:cNvPicPr>
+          <p:nvPr/>
+        </p:nvPicPr>
+        <p:blipFill>
+          <a:blip r:embed="rId2"/>
+          <a:stretch>
+            <a:fillRect/>
+          </a:stretch>
+        </p:blipFill>
+        <p:spPr>
+          <a:xfrm>
+            <a:off x="0" y="-1"/>
+            <a:ext cx="12192000" cy="5344999"/>
+          </a:xfrm>
+          <a:prstGeom prst="rect">
+            <a:avLst/>
+          </a:prstGeom>
+        </p:spPr>
+      </p:pic>
+      <p:sp>
+        <p:nvSpPr>
+          <p:cNvPr id="4" name="Slide Number Placeholder 3">
+            <a:extLst>
+              <a:ext uri="{FF2B5EF4-FFF2-40B4-BE49-F238E27FC236}">
+                <a16:creationId xmlns:a16="http://schemas.microsoft.com/office/drawing/2014/main" id="{7C49F610-BD5C-3D78-D461-370909AF8A5C}"/>
+              </a:ext>
+            </a:extLst>
+          </p:cNvPr>
+          <p:cNvSpPr>
+            <a:spLocks noGrp="1"/>
+          </p:cNvSpPr>
+          <p:nvPr>
+            <p:ph type="sldNum" sz="quarter" idx="12"/>
+          </p:nvPr>
+        </p:nvSpPr>
+        <p:spPr/>
+        <p:txBody>
+          <a:bodyPr/>
+          <a:lstStyle/>
+          <a:p>
+            <a:fld id="{FB36CCB4-83A5-44F7-9530-B4433D444995}" type="slidenum">
+              <a:rPr lang="en-US" smtClean="0"/>
+              <a:t>11</a:t>
+            </a:fld>
+            <a:endParaRPr lang="en-US"/>
+          </a:p>
+        </p:txBody>
+      </p:sp>
+    </p:spTree>
+    <p:extLst>
+      <p:ext uri="{BB962C8B-B14F-4D97-AF65-F5344CB8AC3E}">
+        <p14:creationId xmlns:p14="http://schemas.microsoft.com/office/powerpoint/2010/main" val="1601604347"/>
+      </p:ext>
+    </p:extLst>
+  </p:cSld>
+  <p:clrMapOvr>
+    <a:masterClrMapping/>
+  </p:clrMapOvr>
+</p:sld>
+</file>
+
+<file path=ppt/slides/slide12.xml><?xml version="1.0" encoding="utf-8"?>
+<p:sld xmlns:a="http://schemas.openxmlformats.org/drawingml/2006/main" xmlns:r="http://schemas.openxmlformats.org/officeDocument/2006/relationships" xmlns:p="http://schemas.openxmlformats.org/presentationml/2006/main">
+  <p:cSld>
+    <p:spTree>
+      <p:nvGrpSpPr>
+        <p:cNvPr id="1" name="">
+          <a:extLst>
+            <a:ext uri="{FF2B5EF4-FFF2-40B4-BE49-F238E27FC236}">
+              <a16:creationId xmlns:a16="http://schemas.microsoft.com/office/drawing/2014/main" id="{0664768D-AAB4-5998-3E79-DCE5861E1EEA}"/>
+            </a:ext>
+          </a:extLst>
+        </p:cNvPr>
+        <p:cNvGrpSpPr/>
+        <p:nvPr/>
+      </p:nvGrpSpPr>
+      <p:grpSpPr>
+        <a:xfrm>
+          <a:off x="0" y="0"/>
+          <a:ext cx="0" cy="0"/>
+          <a:chOff x="0" y="0"/>
+          <a:chExt cx="0" cy="0"/>
+        </a:xfrm>
+      </p:grpSpPr>
+      <p:sp>
+        <p:nvSpPr>
+          <p:cNvPr id="2" name="Title 1">
+            <a:extLst>
+              <a:ext uri="{FF2B5EF4-FFF2-40B4-BE49-F238E27FC236}">
+                <a16:creationId xmlns:a16="http://schemas.microsoft.com/office/drawing/2014/main" id="{611FEDCF-2681-9CD2-FFF9-0D3835BEBD65}"/>
+              </a:ext>
+            </a:extLst>
+          </p:cNvPr>
+          <p:cNvSpPr>
+            <a:spLocks noGrp="1"/>
+          </p:cNvSpPr>
+          <p:nvPr>
+            <p:ph type="title"/>
+          </p:nvPr>
+        </p:nvSpPr>
+        <p:spPr>
+          <a:xfrm>
+            <a:off x="1039353" y="6104347"/>
+            <a:ext cx="10113264" cy="822960"/>
+          </a:xfrm>
+        </p:spPr>
+        <p:txBody>
+          <a:bodyPr/>
+          <a:lstStyle/>
+          <a:p>
+            <a:pPr algn="ctr"/>
+            <a:r>
+              <a:rPr lang="en-US" dirty="0" err="1"/>
+              <a:t>Streamlit</a:t>
+            </a:r>
+            <a:r>
+              <a:rPr lang="en-US" dirty="0"/>
+              <a:t> Web Application</a:t>
+            </a:r>
+          </a:p>
+        </p:txBody>
+      </p:sp>
+      <p:sp>
+        <p:nvSpPr>
+          <p:cNvPr id="3" name="Picture Placeholder 2">
+            <a:extLst>
+              <a:ext uri="{FF2B5EF4-FFF2-40B4-BE49-F238E27FC236}">
+                <a16:creationId xmlns:a16="http://schemas.microsoft.com/office/drawing/2014/main" id="{636D3E6C-350C-DF50-BD22-B4B93DB6035E}"/>
+              </a:ext>
+            </a:extLst>
+          </p:cNvPr>
+          <p:cNvSpPr>
+            <a:spLocks noGrp="1"/>
+          </p:cNvSpPr>
+          <p:nvPr>
+            <p:ph type="pic" idx="1"/>
+          </p:nvPr>
+        </p:nvSpPr>
+        <p:spPr/>
+      </p:sp>
+      <p:pic>
+        <p:nvPicPr>
+          <p:cNvPr id="6" name="Picture 5">
+            <a:extLst>
+              <a:ext uri="{FF2B5EF4-FFF2-40B4-BE49-F238E27FC236}">
+                <a16:creationId xmlns:a16="http://schemas.microsoft.com/office/drawing/2014/main" id="{726E5414-891A-1A74-861C-71FA1EB11F65}"/>
+              </a:ext>
+            </a:extLst>
+          </p:cNvPr>
+          <p:cNvPicPr>
+            <a:picLocks noChangeAspect="1"/>
+          </p:cNvPicPr>
+          <p:nvPr/>
+        </p:nvPicPr>
+        <p:blipFill>
+          <a:blip r:embed="rId2"/>
+          <a:stretch>
+            <a:fillRect/>
+          </a:stretch>
+        </p:blipFill>
+        <p:spPr>
+          <a:xfrm>
+            <a:off x="-15" y="0"/>
+            <a:ext cx="12192000" cy="6442255"/>
+          </a:xfrm>
+          <a:prstGeom prst="rect">
+            <a:avLst/>
+          </a:prstGeom>
+        </p:spPr>
+      </p:pic>
+      <p:sp>
+        <p:nvSpPr>
+          <p:cNvPr id="7" name="Slide Number Placeholder 6">
+            <a:extLst>
+              <a:ext uri="{FF2B5EF4-FFF2-40B4-BE49-F238E27FC236}">
+                <a16:creationId xmlns:a16="http://schemas.microsoft.com/office/drawing/2014/main" id="{8B0D2FF4-5F4C-8923-FBB7-3AFFD8BF8159}"/>
+              </a:ext>
+            </a:extLst>
+          </p:cNvPr>
+          <p:cNvSpPr>
+            <a:spLocks noGrp="1"/>
+          </p:cNvSpPr>
+          <p:nvPr>
+            <p:ph type="sldNum" sz="quarter" idx="12"/>
+          </p:nvPr>
+        </p:nvSpPr>
+        <p:spPr/>
+        <p:txBody>
+          <a:bodyPr/>
+          <a:lstStyle/>
+          <a:p>
+            <a:fld id="{FB36CCB4-83A5-44F7-9530-B4433D444995}" type="slidenum">
+              <a:rPr lang="en-US" smtClean="0"/>
+              <a:t>12</a:t>
+            </a:fld>
+            <a:endParaRPr lang="en-US"/>
+          </a:p>
+        </p:txBody>
+      </p:sp>
+    </p:spTree>
+    <p:extLst>
+      <p:ext uri="{BB962C8B-B14F-4D97-AF65-F5344CB8AC3E}">
+        <p14:creationId xmlns:p14="http://schemas.microsoft.com/office/powerpoint/2010/main" val="3059051291"/>
+      </p:ext>
+    </p:extLst>
+  </p:cSld>
+  <p:clrMapOvr>
+    <a:masterClrMapping/>
+  </p:clrMapOvr>
+</p:sld>
+</file>
+
+<file path=ppt/slides/slide13.xml><?xml version="1.0" encoding="utf-8"?>
+<p:sld xmlns:a="http://schemas.openxmlformats.org/drawingml/2006/main" xmlns:r="http://schemas.openxmlformats.org/officeDocument/2006/relationships" xmlns:p="http://schemas.openxmlformats.org/presentationml/2006/main">
+  <p:cSld>
+    <p:spTree>
+      <p:nvGrpSpPr>
+        <p:cNvPr id="1" name=""/>
+        <p:cNvGrpSpPr/>
+        <p:nvPr/>
+      </p:nvGrpSpPr>
+      <p:grpSpPr>
+        <a:xfrm>
+          <a:off x="0" y="0"/>
+          <a:ext cx="0" cy="0"/>
+          <a:chOff x="0" y="0"/>
+          <a:chExt cx="0" cy="0"/>
+        </a:xfrm>
+      </p:grpSpPr>
+      <p:sp>
+        <p:nvSpPr>
+          <p:cNvPr id="2" name="Title 1">
+            <a:extLst>
+              <a:ext uri="{FF2B5EF4-FFF2-40B4-BE49-F238E27FC236}">
+                <a16:creationId xmlns:a16="http://schemas.microsoft.com/office/drawing/2014/main" id="{7088B8FE-42E1-780F-025D-8BBCBB4D6577}"/>
+              </a:ext>
+            </a:extLst>
+          </p:cNvPr>
+          <p:cNvSpPr>
+            <a:spLocks noGrp="1"/>
+          </p:cNvSpPr>
+          <p:nvPr>
+            <p:ph type="title"/>
+          </p:nvPr>
+        </p:nvSpPr>
+        <p:spPr/>
+        <p:txBody>
+          <a:bodyPr/>
+          <a:lstStyle/>
+          <a:p>
+            <a:r>
+              <a:rPr lang="en-US" dirty="0"/>
+              <a:t>Future Aspects</a:t>
+            </a:r>
+          </a:p>
+        </p:txBody>
+      </p:sp>
+      <p:sp>
+        <p:nvSpPr>
+          <p:cNvPr id="3" name="Content Placeholder 2">
+            <a:extLst>
+              <a:ext uri="{FF2B5EF4-FFF2-40B4-BE49-F238E27FC236}">
+                <a16:creationId xmlns:a16="http://schemas.microsoft.com/office/drawing/2014/main" id="{40B7B3C6-A8F3-86C6-091F-C43DC01A2619}"/>
+              </a:ext>
+            </a:extLst>
+          </p:cNvPr>
+          <p:cNvSpPr>
+            <a:spLocks noGrp="1"/>
+          </p:cNvSpPr>
+          <p:nvPr>
+            <p:ph idx="1"/>
+          </p:nvPr>
+        </p:nvSpPr>
+        <p:spPr/>
+        <p:txBody>
+          <a:bodyPr/>
+          <a:lstStyle/>
+          <a:p>
+            <a:r>
+              <a:rPr lang="en-US" dirty="0"/>
+              <a:t>- </a:t>
+            </a:r>
+            <a:r>
+              <a:rPr lang="en-US" b="1" dirty="0"/>
+              <a:t>Flight Price Model: </a:t>
+            </a:r>
+            <a:r>
+              <a:rPr lang="en-US" dirty="0"/>
+              <a:t>Automatic distance and time integration with destination</a:t>
+            </a:r>
+          </a:p>
+          <a:p>
+            <a:r>
+              <a:rPr lang="en-US" dirty="0"/>
+              <a:t>- </a:t>
+            </a:r>
+            <a:r>
+              <a:rPr lang="en-US" b="1" dirty="0"/>
+              <a:t>Hotel Price Model: </a:t>
+            </a:r>
+            <a:r>
+              <a:rPr lang="en-US" dirty="0"/>
+              <a:t>Hotel </a:t>
+            </a:r>
+            <a:r>
+              <a:rPr lang="en-US" dirty="0" err="1"/>
+              <a:t>proce</a:t>
+            </a:r>
+            <a:r>
+              <a:rPr lang="en-US" dirty="0"/>
+              <a:t> prediction model using Hotels.csv</a:t>
+            </a:r>
+          </a:p>
+          <a:p>
+            <a:r>
+              <a:rPr lang="en-US" dirty="0"/>
+              <a:t>- Flights and Hotels data </a:t>
+            </a:r>
+            <a:r>
+              <a:rPr lang="en-US" b="1" dirty="0"/>
+              <a:t>JOIN</a:t>
+            </a:r>
+            <a:r>
+              <a:rPr lang="en-US" dirty="0"/>
+              <a:t> for a </a:t>
+            </a:r>
+            <a:r>
+              <a:rPr lang="en-US" b="1" dirty="0"/>
+              <a:t>Travel Price Prediction Model</a:t>
+            </a:r>
+            <a:r>
+              <a:rPr lang="en-US" dirty="0"/>
+              <a:t> per user joining the Users data</a:t>
+            </a:r>
+          </a:p>
+          <a:p>
+            <a:r>
+              <a:rPr lang="en-US" dirty="0"/>
+              <a:t>- </a:t>
+            </a:r>
+            <a:r>
+              <a:rPr lang="en-US" b="1" dirty="0"/>
+              <a:t>CI/CD pipeline </a:t>
+            </a:r>
+            <a:r>
+              <a:rPr lang="en-US" dirty="0"/>
+              <a:t>for a production grade application</a:t>
+            </a:r>
+          </a:p>
+          <a:p>
+            <a:r>
+              <a:rPr lang="en-US" dirty="0"/>
+              <a:t>- </a:t>
+            </a:r>
+            <a:r>
+              <a:rPr lang="en-US" b="1" dirty="0"/>
+              <a:t>Kubernetes</a:t>
+            </a:r>
+            <a:r>
+              <a:rPr lang="en-US" dirty="0"/>
+              <a:t> and </a:t>
+            </a:r>
+            <a:r>
+              <a:rPr lang="en-US" b="1" dirty="0"/>
+              <a:t>Monitoring</a:t>
+            </a:r>
+          </a:p>
+          <a:p>
+            <a:endParaRPr lang="en-US" b="1" dirty="0"/>
+          </a:p>
+          <a:p>
+            <a:endParaRPr lang="en-US" dirty="0"/>
+          </a:p>
+          <a:p>
+            <a:pPr marL="0" indent="0">
+              <a:buNone/>
+            </a:pPr>
+            <a:endParaRPr lang="en-US" dirty="0"/>
+          </a:p>
+        </p:txBody>
+      </p:sp>
+      <p:sp>
+        <p:nvSpPr>
+          <p:cNvPr id="4" name="Slide Number Placeholder 3">
+            <a:extLst>
+              <a:ext uri="{FF2B5EF4-FFF2-40B4-BE49-F238E27FC236}">
+                <a16:creationId xmlns:a16="http://schemas.microsoft.com/office/drawing/2014/main" id="{1FF3332E-085C-A15E-A4E3-8887853AC628}"/>
+              </a:ext>
+            </a:extLst>
+          </p:cNvPr>
+          <p:cNvSpPr>
+            <a:spLocks noGrp="1"/>
+          </p:cNvSpPr>
+          <p:nvPr>
+            <p:ph type="sldNum" sz="quarter" idx="12"/>
+          </p:nvPr>
+        </p:nvSpPr>
+        <p:spPr/>
+        <p:txBody>
+          <a:bodyPr/>
+          <a:lstStyle/>
+          <a:p>
+            <a:fld id="{FB36CCB4-83A5-44F7-9530-B4433D444995}" type="slidenum">
+              <a:rPr lang="en-US" smtClean="0"/>
+              <a:t>13</a:t>
+            </a:fld>
+            <a:endParaRPr lang="en-US"/>
+          </a:p>
+        </p:txBody>
+      </p:sp>
+    </p:spTree>
+    <p:extLst>
+      <p:ext uri="{BB962C8B-B14F-4D97-AF65-F5344CB8AC3E}">
+        <p14:creationId xmlns:p14="http://schemas.microsoft.com/office/powerpoint/2010/main" val="295514367"/>
+      </p:ext>
+    </p:extLst>
+  </p:cSld>
+  <p:clrMapOvr>
+    <a:masterClrMapping/>
+  </p:clrMapOvr>
+</p:sld>
+</file>
+
+<file path=ppt/slides/slide14.xml><?xml version="1.0" encoding="utf-8"?>
+<p:sld xmlns:a="http://schemas.openxmlformats.org/drawingml/2006/main" xmlns:r="http://schemas.openxmlformats.org/officeDocument/2006/relationships" xmlns:p="http://schemas.openxmlformats.org/presentationml/2006/main">
+  <p:cSld>
+    <p:spTree>
+      <p:nvGrpSpPr>
+        <p:cNvPr id="1" name=""/>
+        <p:cNvGrpSpPr/>
+        <p:nvPr/>
+      </p:nvGrpSpPr>
+      <p:grpSpPr>
+        <a:xfrm>
+          <a:off x="0" y="0"/>
+          <a:ext cx="0" cy="0"/>
+          <a:chOff x="0" y="0"/>
+          <a:chExt cx="0" cy="0"/>
+        </a:xfrm>
+      </p:grpSpPr>
+      <p:sp>
+        <p:nvSpPr>
+          <p:cNvPr id="2" name="Title 1">
+            <a:extLst>
+              <a:ext uri="{FF2B5EF4-FFF2-40B4-BE49-F238E27FC236}">
+                <a16:creationId xmlns:a16="http://schemas.microsoft.com/office/drawing/2014/main" id="{78579CB1-91D0-5C47-6BFB-C44BE065CF21}"/>
+              </a:ext>
+            </a:extLst>
+          </p:cNvPr>
+          <p:cNvSpPr>
+            <a:spLocks noGrp="1"/>
+          </p:cNvSpPr>
+          <p:nvPr>
+            <p:ph type="title"/>
+          </p:nvPr>
+        </p:nvSpPr>
+        <p:spPr>
+          <a:xfrm>
+            <a:off x="1039368" y="5099902"/>
+            <a:ext cx="10113264" cy="534028"/>
+          </a:xfrm>
+        </p:spPr>
+        <p:txBody>
+          <a:bodyPr/>
+          <a:lstStyle/>
+          <a:p>
+            <a:pPr algn="ctr"/>
+            <a:r>
+              <a:rPr lang="en-US" dirty="0"/>
+              <a:t>Thank you</a:t>
+            </a:r>
+          </a:p>
+        </p:txBody>
+      </p:sp>
+      <p:pic>
+        <p:nvPicPr>
+          <p:cNvPr id="6" name="Picture Placeholder 5">
+            <a:extLst>
+              <a:ext uri="{FF2B5EF4-FFF2-40B4-BE49-F238E27FC236}">
+                <a16:creationId xmlns:a16="http://schemas.microsoft.com/office/drawing/2014/main" id="{87D0A37A-5224-F88C-E5F3-E250FFA69C07}"/>
+              </a:ext>
+            </a:extLst>
+          </p:cNvPr>
+          <p:cNvPicPr>
+            <a:picLocks noGrp="1" noChangeAspect="1"/>
+          </p:cNvPicPr>
+          <p:nvPr>
+            <p:ph type="pic" idx="1"/>
+          </p:nvPr>
+        </p:nvPicPr>
+        <p:blipFill>
+          <a:blip r:embed="rId2">
+            <a:extLst>
+              <a:ext uri="{28A0092B-C50C-407E-A947-70E740481C1C}">
+                <a14:useLocalDpi xmlns:a14="http://schemas.microsoft.com/office/drawing/2010/main" val="0"/>
+              </a:ext>
+            </a:extLst>
+          </a:blip>
+          <a:srcRect l="17" t="21848" r="-103" b="37914"/>
+          <a:stretch>
+            <a:fillRect/>
+          </a:stretch>
+        </p:blipFill>
+        <p:spPr>
+          <a:xfrm>
+            <a:off x="0" y="0"/>
+            <a:ext cx="12192000" cy="4901938"/>
+          </a:xfrm>
+        </p:spPr>
+      </p:pic>
+      <p:sp>
+        <p:nvSpPr>
+          <p:cNvPr id="7" name="Slide Number Placeholder 6">
+            <a:extLst>
+              <a:ext uri="{FF2B5EF4-FFF2-40B4-BE49-F238E27FC236}">
+                <a16:creationId xmlns:a16="http://schemas.microsoft.com/office/drawing/2014/main" id="{E2A16DC1-3739-F70D-A5E7-18C26E38BC5E}"/>
+              </a:ext>
+            </a:extLst>
+          </p:cNvPr>
+          <p:cNvSpPr>
+            <a:spLocks noGrp="1"/>
+          </p:cNvSpPr>
+          <p:nvPr>
+            <p:ph type="sldNum" sz="quarter" idx="12"/>
+          </p:nvPr>
+        </p:nvSpPr>
+        <p:spPr/>
+        <p:txBody>
+          <a:bodyPr/>
+          <a:lstStyle/>
+          <a:p>
+            <a:fld id="{FB36CCB4-83A5-44F7-9530-B4433D444995}" type="slidenum">
+              <a:rPr lang="en-US" smtClean="0"/>
+              <a:t>14</a:t>
+            </a:fld>
+            <a:endParaRPr lang="en-US" dirty="0"/>
+          </a:p>
+        </p:txBody>
+      </p:sp>
+      <p:sp>
+        <p:nvSpPr>
+          <p:cNvPr id="3" name="TextBox 2">
+            <a:extLst>
+              <a:ext uri="{FF2B5EF4-FFF2-40B4-BE49-F238E27FC236}">
+                <a16:creationId xmlns:a16="http://schemas.microsoft.com/office/drawing/2014/main" id="{880EE83A-A9A6-5DA9-A16D-E42A0141BDDE}"/>
+              </a:ext>
+            </a:extLst>
+          </p:cNvPr>
+          <p:cNvSpPr txBox="1"/>
+          <p:nvPr/>
+        </p:nvSpPr>
+        <p:spPr>
+          <a:xfrm>
+            <a:off x="3461415" y="5633930"/>
+            <a:ext cx="5269169" cy="923330"/>
+          </a:xfrm>
+          <a:prstGeom prst="rect">
+            <a:avLst/>
+          </a:prstGeom>
+          <a:noFill/>
+        </p:spPr>
+        <p:txBody>
+          <a:bodyPr wrap="square" rtlCol="0">
+            <a:spAutoFit/>
+          </a:bodyPr>
+          <a:lstStyle/>
+          <a:p>
+            <a:r>
+              <a:rPr lang="en-US" dirty="0">
+                <a:solidFill>
+                  <a:schemeClr val="bg1"/>
+                </a:solidFill>
+              </a:rPr>
+              <a:t>LinkedIn: 	https://www.linkedin.com/in/srushti-suthar/</a:t>
+            </a:r>
+          </a:p>
+          <a:p>
+            <a:r>
+              <a:rPr lang="en-US" dirty="0">
+                <a:solidFill>
+                  <a:schemeClr val="bg1"/>
+                </a:solidFill>
+              </a:rPr>
+              <a:t>GitHub: 	https://github.com/SrushtiSuthar</a:t>
+            </a:r>
+          </a:p>
+          <a:p>
+            <a:r>
+              <a:rPr lang="en-US" dirty="0">
+                <a:solidFill>
+                  <a:schemeClr val="bg1"/>
+                </a:solidFill>
+              </a:rPr>
+              <a:t>Email: 	srusht.suthar@gmail.com</a:t>
+            </a:r>
+          </a:p>
+        </p:txBody>
+      </p:sp>
+    </p:spTree>
+    <p:extLst>
+      <p:ext uri="{BB962C8B-B14F-4D97-AF65-F5344CB8AC3E}">
+        <p14:creationId xmlns:p14="http://schemas.microsoft.com/office/powerpoint/2010/main" val="1788717958"/>
       </p:ext>
     </p:extLst>
   </p:cSld>
@@ -12775,6 +13557,35 @@
               <a:rPr lang="en-US" dirty="0"/>
               <a:t> through hands-on application.</a:t>
             </a:r>
+          </a:p>
+        </p:txBody>
+      </p:sp>
+      <p:sp>
+        <p:nvSpPr>
+          <p:cNvPr id="4" name="Slide Number Placeholder 3">
+            <a:extLst>
+              <a:ext uri="{FF2B5EF4-FFF2-40B4-BE49-F238E27FC236}">
+                <a16:creationId xmlns:a16="http://schemas.microsoft.com/office/drawing/2014/main" id="{AB44C592-DA68-5939-878F-4BF13407966F}"/>
+              </a:ext>
+            </a:extLst>
+          </p:cNvPr>
+          <p:cNvSpPr>
+            <a:spLocks noGrp="1"/>
+          </p:cNvSpPr>
+          <p:nvPr>
+            <p:ph type="sldNum" sz="quarter" idx="12"/>
+          </p:nvPr>
+        </p:nvSpPr>
+        <p:spPr/>
+        <p:txBody>
+          <a:bodyPr/>
+          <a:lstStyle/>
+          <a:p>
+            <a:fld id="{FB36CCB4-83A5-44F7-9530-B4433D444995}" type="slidenum">
+              <a:rPr lang="en-US" smtClean="0"/>
+              <a:t>2</a:t>
+            </a:fld>
+            <a:endParaRPr lang="en-US"/>
           </a:p>
         </p:txBody>
       </p:sp>
@@ -12916,6 +13727,35 @@
           </a:p>
           <a:p>
             <a:endParaRPr lang="en-US" dirty="0"/>
+          </a:p>
+        </p:txBody>
+      </p:sp>
+      <p:sp>
+        <p:nvSpPr>
+          <p:cNvPr id="4" name="Slide Number Placeholder 3">
+            <a:extLst>
+              <a:ext uri="{FF2B5EF4-FFF2-40B4-BE49-F238E27FC236}">
+                <a16:creationId xmlns:a16="http://schemas.microsoft.com/office/drawing/2014/main" id="{BFDED66E-85FC-E1A9-C6CF-542098717689}"/>
+              </a:ext>
+            </a:extLst>
+          </p:cNvPr>
+          <p:cNvSpPr>
+            <a:spLocks noGrp="1"/>
+          </p:cNvSpPr>
+          <p:nvPr>
+            <p:ph type="sldNum" sz="quarter" idx="12"/>
+          </p:nvPr>
+        </p:nvSpPr>
+        <p:spPr/>
+        <p:txBody>
+          <a:bodyPr/>
+          <a:lstStyle/>
+          <a:p>
+            <a:fld id="{FB36CCB4-83A5-44F7-9530-B4433D444995}" type="slidenum">
+              <a:rPr lang="en-US" smtClean="0"/>
+              <a:t>3</a:t>
+            </a:fld>
+            <a:endParaRPr lang="en-US"/>
           </a:p>
         </p:txBody>
       </p:sp>
@@ -13110,6 +13950,35 @@
               <a:rPr lang="en-US" dirty="0"/>
               <a:t> to manage scalability and handle varying loads efficiently.</a:t>
             </a:r>
+          </a:p>
+        </p:txBody>
+      </p:sp>
+      <p:sp>
+        <p:nvSpPr>
+          <p:cNvPr id="4" name="Slide Number Placeholder 3">
+            <a:extLst>
+              <a:ext uri="{FF2B5EF4-FFF2-40B4-BE49-F238E27FC236}">
+                <a16:creationId xmlns:a16="http://schemas.microsoft.com/office/drawing/2014/main" id="{C9AC7B94-8C1C-4052-FA16-EA0486E14B93}"/>
+              </a:ext>
+            </a:extLst>
+          </p:cNvPr>
+          <p:cNvSpPr>
+            <a:spLocks noGrp="1"/>
+          </p:cNvSpPr>
+          <p:nvPr>
+            <p:ph type="sldNum" sz="quarter" idx="12"/>
+          </p:nvPr>
+        </p:nvSpPr>
+        <p:spPr/>
+        <p:txBody>
+          <a:bodyPr/>
+          <a:lstStyle/>
+          <a:p>
+            <a:fld id="{FB36CCB4-83A5-44F7-9530-B4433D444995}" type="slidenum">
+              <a:rPr lang="en-US" smtClean="0"/>
+              <a:t>4</a:t>
+            </a:fld>
+            <a:endParaRPr lang="en-US"/>
           </a:p>
         </p:txBody>
       </p:sp>
@@ -13538,6 +14407,35 @@
           </a:prstGeom>
         </p:spPr>
       </p:pic>
+      <p:sp>
+        <p:nvSpPr>
+          <p:cNvPr id="5" name="Slide Number Placeholder 4">
+            <a:extLst>
+              <a:ext uri="{FF2B5EF4-FFF2-40B4-BE49-F238E27FC236}">
+                <a16:creationId xmlns:a16="http://schemas.microsoft.com/office/drawing/2014/main" id="{92556726-3895-BE48-4028-862952484625}"/>
+              </a:ext>
+            </a:extLst>
+          </p:cNvPr>
+          <p:cNvSpPr>
+            <a:spLocks noGrp="1"/>
+          </p:cNvSpPr>
+          <p:nvPr>
+            <p:ph type="sldNum" sz="quarter" idx="12"/>
+          </p:nvPr>
+        </p:nvSpPr>
+        <p:spPr/>
+        <p:txBody>
+          <a:bodyPr/>
+          <a:lstStyle/>
+          <a:p>
+            <a:fld id="{FB36CCB4-83A5-44F7-9530-B4433D444995}" type="slidenum">
+              <a:rPr lang="en-US" smtClean="0"/>
+              <a:t>5</a:t>
+            </a:fld>
+            <a:endParaRPr lang="en-US"/>
+          </a:p>
+        </p:txBody>
+      </p:sp>
     </p:spTree>
     <p:extLst>
       <p:ext uri="{BB962C8B-B14F-4D97-AF65-F5344CB8AC3E}">
@@ -15327,6 +16225,35 @@
           </p:txBody>
         </p:sp>
       </p:grpSp>
+      <p:sp>
+        <p:nvSpPr>
+          <p:cNvPr id="3" name="Slide Number Placeholder 2">
+            <a:extLst>
+              <a:ext uri="{FF2B5EF4-FFF2-40B4-BE49-F238E27FC236}">
+                <a16:creationId xmlns:a16="http://schemas.microsoft.com/office/drawing/2014/main" id="{62A8B5D8-82DA-94B9-25F7-3F05F34774E3}"/>
+              </a:ext>
+            </a:extLst>
+          </p:cNvPr>
+          <p:cNvSpPr>
+            <a:spLocks noGrp="1"/>
+          </p:cNvSpPr>
+          <p:nvPr>
+            <p:ph type="sldNum" sz="quarter" idx="12"/>
+          </p:nvPr>
+        </p:nvSpPr>
+        <p:spPr/>
+        <p:txBody>
+          <a:bodyPr/>
+          <a:lstStyle/>
+          <a:p>
+            <a:fld id="{FB36CCB4-83A5-44F7-9530-B4433D444995}" type="slidenum">
+              <a:rPr lang="en-US" smtClean="0"/>
+              <a:t>6</a:t>
+            </a:fld>
+            <a:endParaRPr lang="en-US"/>
+          </a:p>
+        </p:txBody>
+      </p:sp>
     </p:spTree>
     <p:extLst>
       <p:ext uri="{BB962C8B-B14F-4D97-AF65-F5344CB8AC3E}">
@@ -16195,6 +17122,35 @@
           </a:graphicData>
         </a:graphic>
       </p:graphicFrame>
+      <p:sp>
+        <p:nvSpPr>
+          <p:cNvPr id="6" name="Slide Number Placeholder 5">
+            <a:extLst>
+              <a:ext uri="{FF2B5EF4-FFF2-40B4-BE49-F238E27FC236}">
+                <a16:creationId xmlns:a16="http://schemas.microsoft.com/office/drawing/2014/main" id="{04D0E6E6-3387-6AF0-6D3C-8C0E74773CB6}"/>
+              </a:ext>
+            </a:extLst>
+          </p:cNvPr>
+          <p:cNvSpPr>
+            <a:spLocks noGrp="1"/>
+          </p:cNvSpPr>
+          <p:nvPr>
+            <p:ph type="sldNum" sz="quarter" idx="12"/>
+          </p:nvPr>
+        </p:nvSpPr>
+        <p:spPr/>
+        <p:txBody>
+          <a:bodyPr/>
+          <a:lstStyle/>
+          <a:p>
+            <a:fld id="{FB36CCB4-83A5-44F7-9530-B4433D444995}" type="slidenum">
+              <a:rPr lang="en-US" smtClean="0"/>
+              <a:t>7</a:t>
+            </a:fld>
+            <a:endParaRPr lang="en-US"/>
+          </a:p>
+        </p:txBody>
+      </p:sp>
     </p:spTree>
     <p:extLst>
       <p:ext uri="{BB962C8B-B14F-4D97-AF65-F5344CB8AC3E}">
@@ -17089,13 +18045,13 @@
           </p:spPr>
           <p:style>
             <a:lnRef idx="1">
-              <a:schemeClr val="accent1"/>
+              <a:schemeClr val="dk1"/>
             </a:lnRef>
             <a:fillRef idx="0">
-              <a:schemeClr val="accent1"/>
+              <a:schemeClr val="dk1"/>
             </a:fillRef>
             <a:effectRef idx="0">
-              <a:schemeClr val="accent1"/>
+              <a:schemeClr val="dk1"/>
             </a:effectRef>
             <a:fontRef idx="minor">
               <a:schemeClr val="tx1"/>
@@ -17441,6 +18397,35 @@
           </p:txBody>
         </p:sp>
       </p:grpSp>
+      <p:sp>
+        <p:nvSpPr>
+          <p:cNvPr id="3" name="Slide Number Placeholder 2">
+            <a:extLst>
+              <a:ext uri="{FF2B5EF4-FFF2-40B4-BE49-F238E27FC236}">
+                <a16:creationId xmlns:a16="http://schemas.microsoft.com/office/drawing/2014/main" id="{A287702E-A135-834A-A88C-D05C478F96EC}"/>
+              </a:ext>
+            </a:extLst>
+          </p:cNvPr>
+          <p:cNvSpPr>
+            <a:spLocks noGrp="1"/>
+          </p:cNvSpPr>
+          <p:nvPr>
+            <p:ph type="sldNum" sz="quarter" idx="12"/>
+          </p:nvPr>
+        </p:nvSpPr>
+        <p:spPr/>
+        <p:txBody>
+          <a:bodyPr/>
+          <a:lstStyle/>
+          <a:p>
+            <a:fld id="{FB36CCB4-83A5-44F7-9530-B4433D444995}" type="slidenum">
+              <a:rPr lang="en-US" smtClean="0"/>
+              <a:t>8</a:t>
+            </a:fld>
+            <a:endParaRPr lang="en-US"/>
+          </a:p>
+        </p:txBody>
+      </p:sp>
     </p:spTree>
     <p:extLst>
       <p:ext uri="{BB962C8B-B14F-4D97-AF65-F5344CB8AC3E}">
@@ -17527,6 +18512,35 @@
           </a:graphicData>
         </a:graphic>
       </p:graphicFrame>
+      <p:sp>
+        <p:nvSpPr>
+          <p:cNvPr id="3" name="Slide Number Placeholder 2">
+            <a:extLst>
+              <a:ext uri="{FF2B5EF4-FFF2-40B4-BE49-F238E27FC236}">
+                <a16:creationId xmlns:a16="http://schemas.microsoft.com/office/drawing/2014/main" id="{34AA4FC8-5FD4-A798-666D-2E199B985BAF}"/>
+              </a:ext>
+            </a:extLst>
+          </p:cNvPr>
+          <p:cNvSpPr>
+            <a:spLocks noGrp="1"/>
+          </p:cNvSpPr>
+          <p:nvPr>
+            <p:ph type="sldNum" sz="quarter" idx="12"/>
+          </p:nvPr>
+        </p:nvSpPr>
+        <p:spPr/>
+        <p:txBody>
+          <a:bodyPr/>
+          <a:lstStyle/>
+          <a:p>
+            <a:fld id="{FB36CCB4-83A5-44F7-9530-B4433D444995}" type="slidenum">
+              <a:rPr lang="en-US" smtClean="0"/>
+              <a:t>9</a:t>
+            </a:fld>
+            <a:endParaRPr lang="en-US"/>
+          </a:p>
+        </p:txBody>
+      </p:sp>
     </p:spTree>
     <p:extLst>
       <p:ext uri="{BB962C8B-B14F-4D97-AF65-F5344CB8AC3E}">

--- a/presentation/Voyage_Analytics_MLOps_Srushti_Suthar.pptx
+++ b/presentation/Voyage_Analytics_MLOps_Srushti_Suthar.pptx
@@ -13154,16 +13154,12 @@
               <a:t>Hotel Price Model: </a:t>
             </a:r>
             <a:r>
+              <a:rPr lang="en-US"/>
+              <a:t>Hotel price </a:t>
+            </a:r>
+            <a:r>
               <a:rPr lang="en-US" dirty="0"/>
-              <a:t>Hotel </a:t>
-            </a:r>
-            <a:r>
-              <a:rPr lang="en-US" dirty="0" err="1"/>
-              <a:t>proce</a:t>
-            </a:r>
-            <a:r>
-              <a:rPr lang="en-US" dirty="0"/>
-              <a:t> prediction model using Hotels.csv</a:t>
+              <a:t>prediction model using Hotels.csv</a:t>
             </a:r>
           </a:p>
           <a:p>
